--- a/task1_slides.pptx
+++ b/task1_slides.pptx
@@ -20,6 +20,7 @@
     <p:sldId id="268" r:id="rId19"/>
     <p:sldId id="269" r:id="rId20"/>
     <p:sldId id="270" r:id="rId21"/>
+    <p:sldId id="271" r:id="rId22"/>
   </p:sldIdLst>
   <p:sldSz cx="12191695" cy="6858000" type="screen4x3"/>
   <p:notesSz cx="6858000" cy="9144000"/>
@@ -3421,7 +3422,166 @@
               </a:defRPr>
             </a:pPr>
             <a:r>
-              <a:t>Variable 5 - SNR and speckle</a:t>
+              <a:t>Variable 5 - Processed aperture alpha</a:t>
+            </a:r>
+          </a:p>
+        </p:txBody>
+      </p:sp>
+      <p:sp>
+        <p:nvSpPr>
+          <p:cNvPr id="3" name="TextBox 2"/>
+          <p:cNvSpPr txBox="1"/>
+          <p:nvPr/>
+        </p:nvSpPr>
+        <p:spPr>
+          <a:xfrm>
+            <a:off x="640080" y="1234440"/>
+            <a:ext cx="10972800" cy="5212080"/>
+          </a:xfrm>
+          <a:prstGeom prst="rect">
+            <a:avLst/>
+          </a:prstGeom>
+          <a:noFill/>
+        </p:spPr>
+        <p:txBody>
+          <a:bodyPr wrap="square">
+            <a:spAutoFit/>
+          </a:bodyPr>
+          <a:lstStyle/>
+          <a:p>
+            <a:pPr>
+              <a:spcAft>
+                <a:spcPts val="600"/>
+              </a:spcAft>
+              <a:defRPr sz="1800">
+                <a:solidFill>
+                  <a:srgbClr val="1F2A44"/>
+                </a:solidFill>
+              </a:defRPr>
+            </a:pPr>
+            <a:r>
+              <a:t>Fraction of the full beam-limited illumination time processed.</a:t>
+            </a:r>
+          </a:p>
+          <a:p>
+            <a:pPr>
+              <a:spcAft>
+                <a:spcPts val="600"/>
+              </a:spcAft>
+              <a:defRPr sz="1800">
+                <a:solidFill>
+                  <a:srgbClr val="1F2A44"/>
+                </a:solidFill>
+              </a:defRPr>
+            </a:pPr>
+            <a:r>
+              <a:t>T_a,proc = alpha * Ta,   L_syn = vp * T_a,proc.</a:t>
+            </a:r>
+          </a:p>
+          <a:p>
+            <a:pPr>
+              <a:spcAft>
+                <a:spcPts val="600"/>
+              </a:spcAft>
+              <a:defRPr sz="1800">
+                <a:solidFill>
+                  <a:srgbClr val="1F2A44"/>
+                </a:solidFill>
+              </a:defRPr>
+            </a:pPr>
+            <a:r>
+              <a:t>rho_az = lam*R0*b_a / (2*L_syn): less aperture -&gt; coarser azimuth.</a:t>
+            </a:r>
+          </a:p>
+          <a:p>
+            <a:pPr>
+              <a:spcAft>
+                <a:spcPts val="600"/>
+              </a:spcAft>
+              <a:defRPr sz="1800">
+                <a:solidFill>
+                  <a:srgbClr val="1F2A44"/>
+                </a:solidFill>
+              </a:defRPr>
+            </a:pPr>
+            <a:r>
+              <a:t>At 100/50/25%, rho_az = 1 / 2 / 4 m.</a:t>
+            </a:r>
+          </a:p>
+          <a:p>
+            <a:pPr>
+              <a:spcAft>
+                <a:spcPts val="600"/>
+              </a:spcAft>
+              <a:defRPr sz="1800">
+                <a:solidFill>
+                  <a:srgbClr val="1F2A44"/>
+                </a:solidFill>
+              </a:defRPr>
+            </a:pPr>
+            <a:r>
+              <a:t>Also reduces moving-target range walk.</a:t>
+            </a:r>
+          </a:p>
+        </p:txBody>
+      </p:sp>
+    </p:spTree>
+  </p:cSld>
+  <p:clrMapOvr>
+    <a:masterClrMapping/>
+  </p:clrMapOvr>
+</p:sld>
+</file>
+
+<file path=ppt/slides/slide12.xml><?xml version="1.0" encoding="utf-8"?>
+<p:sld xmlns:a="http://schemas.openxmlformats.org/drawingml/2006/main" xmlns:p="http://schemas.openxmlformats.org/presentationml/2006/main" xmlns:r="http://schemas.openxmlformats.org/officeDocument/2006/relationships">
+  <p:cSld>
+    <p:bg>
+      <p:bgPr>
+        <a:solidFill>
+          <a:srgbClr val="FFFFFF"/>
+        </a:solidFill>
+        <a:effectLst/>
+      </p:bgPr>
+    </p:bg>
+    <p:spTree>
+      <p:nvGrpSpPr>
+        <p:cNvPr id="1" name=""/>
+        <p:cNvGrpSpPr/>
+        <p:nvPr/>
+      </p:nvGrpSpPr>
+      <p:grpSpPr/>
+      <p:sp>
+        <p:nvSpPr>
+          <p:cNvPr id="2" name="TextBox 1"/>
+          <p:cNvSpPr txBox="1"/>
+          <p:nvPr/>
+        </p:nvSpPr>
+        <p:spPr>
+          <a:xfrm>
+            <a:off x="548640" y="274320"/>
+            <a:ext cx="11064240" cy="822960"/>
+          </a:xfrm>
+          <a:prstGeom prst="rect">
+            <a:avLst/>
+          </a:prstGeom>
+          <a:noFill/>
+        </p:spPr>
+        <p:txBody>
+          <a:bodyPr wrap="square">
+            <a:spAutoFit/>
+          </a:bodyPr>
+          <a:lstStyle/>
+          <a:p>
+            <a:pPr>
+              <a:defRPr sz="2800" b="1">
+                <a:solidFill>
+                  <a:srgbClr val="1F2A44"/>
+                </a:solidFill>
+              </a:defRPr>
+            </a:pPr>
+            <a:r>
+              <a:t>Variable 6 - SNR and speckle</a:t>
             </a:r>
           </a:p>
         </p:txBody>
@@ -3541,7 +3701,7 @@
 </p:sld>
 </file>
 
-<file path=ppt/slides/slide12.xml><?xml version="1.0" encoding="utf-8"?>
+<file path=ppt/slides/slide13.xml><?xml version="1.0" encoding="utf-8"?>
 <p:sld xmlns:a="http://schemas.openxmlformats.org/drawingml/2006/main" xmlns:p="http://schemas.openxmlformats.org/presentationml/2006/main" xmlns:r="http://schemas.openxmlformats.org/officeDocument/2006/relationships">
   <p:cSld>
     <p:bg>
@@ -3604,7 +3764,7 @@
         </p:nvGraphicFramePr>
         <p:xfrm>
           <a:off x="548640" y="1371600"/>
-          <a:ext cx="11064240" cy="3291839"/>
+          <a:ext cx="11064240" cy="3840480"/>
         </p:xfrm>
         <a:graphic>
           <a:graphicData uri="http://schemas.openxmlformats.org/drawingml/2006/table">
@@ -3618,7 +3778,7 @@
                 <a:gridCol w="2766060"/>
                 <a:gridCol w="2766060"/>
               </a:tblGrid>
-              <a:tr h="548639">
+              <a:tr h="548640">
                 <a:tc>
                   <a:txBody>
                     <a:bodyPr/>
@@ -3712,7 +3872,7 @@
                   </a:tcPr>
                 </a:tc>
               </a:tr>
-              <a:tr h="548639">
+              <a:tr h="548640">
                 <a:tc>
                   <a:txBody>
                     <a:bodyPr/>
@@ -3767,14 +3927,14 @@
                         <a:defRPr sz="1300"/>
                       </a:pPr>
                       <a:r>
-                        <a:t>dR = c / 2B</a:t>
+                        <a:t>dR = c*b_r/(2B)</a:t>
                       </a:r>
                     </a:p>
                   </a:txBody>
                   <a:tcPr/>
                 </a:tc>
               </a:tr>
-              <a:tr h="548639">
+              <a:tr h="548640">
                 <a:tc>
                   <a:txBody>
                     <a:bodyPr/>
@@ -3852,7 +4012,7 @@
                   </a:tcPr>
                 </a:tc>
               </a:tr>
-              <a:tr h="548639">
+              <a:tr h="548640">
                 <a:tc>
                   <a:txBody>
                     <a:bodyPr/>
@@ -3907,14 +4067,14 @@
                         <a:defRPr sz="1300"/>
                       </a:pPr>
                       <a:r>
-                        <a:t>rho_az = La/2</a:t>
+                        <a:t>rho_az = lam*R0*b_a/(2*L_syn)</a:t>
                       </a:r>
                     </a:p>
                   </a:txBody>
                   <a:tcPr/>
                 </a:tc>
               </a:tr>
-              <a:tr h="548639">
+              <a:tr h="548640">
                 <a:tc>
                   <a:txBody>
                     <a:bodyPr/>
@@ -3924,7 +4084,7 @@
                         <a:defRPr sz="1300"/>
                       </a:pPr>
                       <a:r>
-                        <a:t>Along-track velocity vt</a:t>
+                        <a:t>Processed aperture</a:t>
                       </a:r>
                     </a:p>
                   </a:txBody>
@@ -3943,7 +4103,7 @@
                         <a:defRPr sz="1300"/>
                       </a:pPr>
                       <a:r>
-                        <a:t>Azimuth defocus</a:t>
+                        <a:t>Azimuth clarity</a:t>
                       </a:r>
                     </a:p>
                   </a:txBody>
@@ -3962,7 +4122,7 @@
                         <a:defRPr sz="1300"/>
                       </a:pPr>
                       <a:r>
-                        <a:t>~No</a:t>
+                        <a:t>No</a:t>
                       </a:r>
                     </a:p>
                   </a:txBody>
@@ -3981,7 +4141,7 @@
                         <a:defRPr sz="1300"/>
                       </a:pPr>
                       <a:r>
-                        <a:t>Doppler-rate mismatch</a:t>
+                        <a:t>L_syn = vp*alpha*Ta</a:t>
                       </a:r>
                     </a:p>
                   </a:txBody>
@@ -3992,7 +4152,7 @@
                   </a:tcPr>
                 </a:tc>
               </a:tr>
-              <a:tr h="548644">
+              <a:tr h="548640">
                 <a:tc>
                   <a:txBody>
                     <a:bodyPr/>
@@ -4002,7 +4162,7 @@
                         <a:defRPr sz="1300"/>
                       </a:pPr>
                       <a:r>
-                        <a:t>SNR / speckle</a:t>
+                        <a:t>Along-track velocity vt</a:t>
                       </a:r>
                     </a:p>
                   </a:txBody>
@@ -4017,7 +4177,7 @@
                         <a:defRPr sz="1300"/>
                       </a:pPr>
                       <a:r>
-                        <a:t>Detectability</a:t>
+                        <a:t>Azimuth defocus</a:t>
                       </a:r>
                     </a:p>
                   </a:txBody>
@@ -4032,7 +4192,7 @@
                         <a:defRPr sz="1300"/>
                       </a:pPr>
                       <a:r>
-                        <a:t>No</a:t>
+                        <a:t>~No</a:t>
                       </a:r>
                     </a:p>
                   </a:txBody>
@@ -4047,206 +4207,95 @@
                         <a:defRPr sz="1300"/>
                       </a:pPr>
                       <a:r>
-                        <a:t>noise floor / Rayleigh</a:t>
+                        <a:t>Doppler-rate mismatch</a:t>
                       </a:r>
                     </a:p>
                   </a:txBody>
                   <a:tcPr/>
                 </a:tc>
               </a:tr>
+              <a:tr h="548640">
+                <a:tc>
+                  <a:txBody>
+                    <a:bodyPr/>
+                    <a:lstStyle/>
+                    <a:p>
+                      <a:pPr>
+                        <a:defRPr sz="1300"/>
+                      </a:pPr>
+                      <a:r>
+                        <a:t>SNR / speckle</a:t>
+                      </a:r>
+                    </a:p>
+                  </a:txBody>
+                  <a:tcPr>
+                    <a:solidFill>
+                      <a:srgbClr val="F2F5FA"/>
+                    </a:solidFill>
+                  </a:tcPr>
+                </a:tc>
+                <a:tc>
+                  <a:txBody>
+                    <a:bodyPr/>
+                    <a:lstStyle/>
+                    <a:p>
+                      <a:pPr>
+                        <a:defRPr sz="1300"/>
+                      </a:pPr>
+                      <a:r>
+                        <a:t>Detectability</a:t>
+                      </a:r>
+                    </a:p>
+                  </a:txBody>
+                  <a:tcPr>
+                    <a:solidFill>
+                      <a:srgbClr val="F2F5FA"/>
+                    </a:solidFill>
+                  </a:tcPr>
+                </a:tc>
+                <a:tc>
+                  <a:txBody>
+                    <a:bodyPr/>
+                    <a:lstStyle/>
+                    <a:p>
+                      <a:pPr>
+                        <a:defRPr sz="1300"/>
+                      </a:pPr>
+                      <a:r>
+                        <a:t>No</a:t>
+                      </a:r>
+                    </a:p>
+                  </a:txBody>
+                  <a:tcPr>
+                    <a:solidFill>
+                      <a:srgbClr val="F2F5FA"/>
+                    </a:solidFill>
+                  </a:tcPr>
+                </a:tc>
+                <a:tc>
+                  <a:txBody>
+                    <a:bodyPr/>
+                    <a:lstStyle/>
+                    <a:p>
+                      <a:pPr>
+                        <a:defRPr sz="1300"/>
+                      </a:pPr>
+                      <a:r>
+                        <a:t>noise floor / Rayleigh</a:t>
+                      </a:r>
+                    </a:p>
+                  </a:txBody>
+                  <a:tcPr>
+                    <a:solidFill>
+                      <a:srgbClr val="F2F5FA"/>
+                    </a:solidFill>
+                  </a:tcPr>
+                </a:tc>
+              </a:tr>
             </a:tbl>
           </a:graphicData>
         </a:graphic>
       </p:graphicFrame>
-    </p:spTree>
-  </p:cSld>
-  <p:clrMapOvr>
-    <a:masterClrMapping/>
-  </p:clrMapOvr>
-</p:sld>
-</file>
-
-<file path=ppt/slides/slide13.xml><?xml version="1.0" encoding="utf-8"?>
-<p:sld xmlns:a="http://schemas.openxmlformats.org/drawingml/2006/main" xmlns:p="http://schemas.openxmlformats.org/presentationml/2006/main" xmlns:r="http://schemas.openxmlformats.org/officeDocument/2006/relationships">
-  <p:cSld>
-    <p:bg>
-      <p:bgPr>
-        <a:solidFill>
-          <a:srgbClr val="FFFFFF"/>
-        </a:solidFill>
-        <a:effectLst/>
-      </p:bgPr>
-    </p:bg>
-    <p:spTree>
-      <p:nvGrpSpPr>
-        <p:cNvPr id="1" name=""/>
-        <p:cNvGrpSpPr/>
-        <p:nvPr/>
-      </p:nvGrpSpPr>
-      <p:grpSpPr/>
-      <p:sp>
-        <p:nvSpPr>
-          <p:cNvPr id="2" name="TextBox 1"/>
-          <p:cNvSpPr txBox="1"/>
-          <p:nvPr/>
-        </p:nvSpPr>
-        <p:spPr>
-          <a:xfrm>
-            <a:off x="548640" y="274320"/>
-            <a:ext cx="11064240" cy="822960"/>
-          </a:xfrm>
-          <a:prstGeom prst="rect">
-            <a:avLst/>
-          </a:prstGeom>
-          <a:noFill/>
-        </p:spPr>
-        <p:txBody>
-          <a:bodyPr wrap="square">
-            <a:spAutoFit/>
-          </a:bodyPr>
-          <a:lstStyle/>
-          <a:p>
-            <a:pPr>
-              <a:defRPr sz="2800" b="1">
-                <a:solidFill>
-                  <a:srgbClr val="1F2A44"/>
-                </a:solidFill>
-              </a:defRPr>
-            </a:pPr>
-            <a:r>
-              <a:t>Cheat sheet: the equations</a:t>
-            </a:r>
-          </a:p>
-        </p:txBody>
-      </p:sp>
-      <p:sp>
-        <p:nvSpPr>
-          <p:cNvPr id="3" name="TextBox 2"/>
-          <p:cNvSpPr txBox="1"/>
-          <p:nvPr/>
-        </p:nvSpPr>
-        <p:spPr>
-          <a:xfrm>
-            <a:off x="640080" y="1234440"/>
-            <a:ext cx="10972800" cy="5212080"/>
-          </a:xfrm>
-          <a:prstGeom prst="rect">
-            <a:avLst/>
-          </a:prstGeom>
-          <a:noFill/>
-        </p:spPr>
-        <p:txBody>
-          <a:bodyPr wrap="square">
-            <a:spAutoFit/>
-          </a:bodyPr>
-          <a:lstStyle/>
-          <a:p>
-            <a:pPr>
-              <a:spcAft>
-                <a:spcPts val="600"/>
-              </a:spcAft>
-              <a:defRPr sz="1900">
-                <a:solidFill>
-                  <a:srgbClr val="1F2A44"/>
-                </a:solidFill>
-              </a:defRPr>
-            </a:pPr>
-            <a:r>
-              <a:t>Range resolution:            dR = c / (2B)</a:t>
-            </a:r>
-          </a:p>
-          <a:p>
-            <a:pPr>
-              <a:spcAft>
-                <a:spcPts val="600"/>
-              </a:spcAft>
-              <a:defRPr sz="1900">
-                <a:solidFill>
-                  <a:srgbClr val="1F2A44"/>
-                </a:solidFill>
-              </a:defRPr>
-            </a:pPr>
-            <a:r>
-              <a:t>Azimuth resolution:          rho_az = La / 2</a:t>
-            </a:r>
-          </a:p>
-          <a:p>
-            <a:pPr>
-              <a:spcAft>
-                <a:spcPts val="600"/>
-              </a:spcAft>
-              <a:defRPr sz="1900">
-                <a:solidFill>
-                  <a:srgbClr val="1F2A44"/>
-                </a:solidFill>
-              </a:defRPr>
-            </a:pPr>
-            <a:r>
-              <a:t>Doppler bandwidth:           Bd = 2 vp / La</a:t>
-            </a:r>
-          </a:p>
-          <a:p>
-            <a:pPr>
-              <a:spcAft>
-                <a:spcPts val="600"/>
-              </a:spcAft>
-              <a:defRPr sz="1900">
-                <a:solidFill>
-                  <a:srgbClr val="1F2A44"/>
-                </a:solidFill>
-              </a:defRPr>
-            </a:pPr>
-            <a:r>
-              <a:t>Doppler rate:                fR = 2 vp^2 / (lambda R0)</a:t>
-            </a:r>
-          </a:p>
-          <a:p>
-            <a:pPr>
-              <a:spcAft>
-                <a:spcPts val="600"/>
-              </a:spcAft>
-              <a:defRPr sz="1900">
-                <a:solidFill>
-                  <a:srgbClr val="1F2A44"/>
-                </a:solidFill>
-              </a:defRPr>
-            </a:pPr>
-            <a:r>
-              <a:t>Doppler centroid (moving):   f_dc = 2 vr / lambda</a:t>
-            </a:r>
-          </a:p>
-          <a:p>
-            <a:pPr>
-              <a:spcAft>
-                <a:spcPts val="600"/>
-              </a:spcAft>
-              <a:defRPr sz="1900">
-                <a:solidFill>
-                  <a:srgbClr val="1F2A44"/>
-                </a:solidFill>
-              </a:defRPr>
-            </a:pPr>
-            <a:r>
-              <a:t>Synthetic aperture time:     Ta = R0 * theta / vp,  theta = lambda / La</a:t>
-            </a:r>
-          </a:p>
-          <a:p>
-            <a:pPr>
-              <a:spcAft>
-                <a:spcPts val="600"/>
-              </a:spcAft>
-              <a:defRPr sz="1900">
-                <a:solidFill>
-                  <a:srgbClr val="1F2A44"/>
-                </a:solidFill>
-              </a:defRPr>
-            </a:pPr>
-            <a:r>
-              <a:t>Range to target:             R = c * tau / 2</a:t>
-            </a:r>
-          </a:p>
-        </p:txBody>
-      </p:sp>
     </p:spTree>
   </p:cSld>
   <p:clrMapOvr>
@@ -4303,7 +4352,7 @@
               </a:defRPr>
             </a:pPr>
             <a:r>
-              <a:t>Glossary of SAR terms</a:t>
+              <a:t>Cheat sheet: the equations</a:t>
             </a:r>
           </a:p>
         </p:txBody>
@@ -4334,164 +4383,134 @@
               <a:spcAft>
                 <a:spcPts val="600"/>
               </a:spcAft>
-              <a:defRPr sz="1400">
-                <a:solidFill>
-                  <a:srgbClr val="1F2A44"/>
-                </a:solidFill>
-              </a:defRPr>
-            </a:pPr>
-            <a:r>
-              <a:t>Range - distance to target, from echo delay.</a:t>
-            </a:r>
-          </a:p>
-          <a:p>
-            <a:pPr>
-              <a:spcAft>
-                <a:spcPts val="600"/>
-              </a:spcAft>
-              <a:defRPr sz="1400">
-                <a:solidFill>
-                  <a:srgbClr val="1F2A44"/>
-                </a:solidFill>
-              </a:defRPr>
-            </a:pPr>
-            <a:r>
-              <a:t>Azimuth / cross-range - along-track position, from Doppler.</a:t>
-            </a:r>
-          </a:p>
-          <a:p>
-            <a:pPr>
-              <a:spcAft>
-                <a:spcPts val="600"/>
-              </a:spcAft>
-              <a:defRPr sz="1400">
-                <a:solidFill>
-                  <a:srgbClr val="1F2A44"/>
-                </a:solidFill>
-              </a:defRPr>
-            </a:pPr>
-            <a:r>
-              <a:t>Slant range R0 - straight-line distance from radar to target.</a:t>
-            </a:r>
-          </a:p>
-          <a:p>
-            <a:pPr>
-              <a:spcAft>
-                <a:spcPts val="600"/>
-              </a:spcAft>
-              <a:defRPr sz="1400">
-                <a:solidFill>
-                  <a:srgbClr val="1F2A44"/>
-                </a:solidFill>
-              </a:defRPr>
-            </a:pPr>
-            <a:r>
-              <a:t>Chirp - a pulse whose frequency sweeps over time.</a:t>
-            </a:r>
-          </a:p>
-          <a:p>
-            <a:pPr>
-              <a:spcAft>
-                <a:spcPts val="600"/>
-              </a:spcAft>
-              <a:defRPr sz="1400">
-                <a:solidFill>
-                  <a:srgbClr val="1F2A44"/>
-                </a:solidFill>
-              </a:defRPr>
-            </a:pPr>
-            <a:r>
-              <a:t>Pulse / range compression - matched filtering that sharpens echoes in range.</a:t>
-            </a:r>
-          </a:p>
-          <a:p>
-            <a:pPr>
-              <a:spcAft>
-                <a:spcPts val="600"/>
-              </a:spcAft>
-              <a:defRPr sz="1400">
-                <a:solidFill>
-                  <a:srgbClr val="1F2A44"/>
-                </a:solidFill>
-              </a:defRPr>
-            </a:pPr>
-            <a:r>
-              <a:t>Doppler history - the changing echo frequency as the platform passes the target.</a:t>
-            </a:r>
-          </a:p>
-          <a:p>
-            <a:pPr>
-              <a:spcAft>
-                <a:spcPts val="600"/>
-              </a:spcAft>
-              <a:defRPr sz="1400">
-                <a:solidFill>
-                  <a:srgbClr val="1F2A44"/>
-                </a:solidFill>
-              </a:defRPr>
-            </a:pPr>
-            <a:r>
-              <a:t>Doppler centroid - the mean Doppler shift (zero for a still target broadside).</a:t>
-            </a:r>
-          </a:p>
-          <a:p>
-            <a:pPr>
-              <a:spcAft>
-                <a:spcPts val="600"/>
-              </a:spcAft>
-              <a:defRPr sz="1400">
-                <a:solidFill>
-                  <a:srgbClr val="1F2A44"/>
-                </a:solidFill>
-              </a:defRPr>
-            </a:pPr>
-            <a:r>
-              <a:t>Synthetic aperture - the long effective antenna formed by platform motion.</a:t>
-            </a:r>
-          </a:p>
-          <a:p>
-            <a:pPr>
-              <a:spcAft>
-                <a:spcPts val="600"/>
-              </a:spcAft>
-              <a:defRPr sz="1400">
-                <a:solidFill>
-                  <a:srgbClr val="1F2A44"/>
-                </a:solidFill>
-              </a:defRPr>
-            </a:pPr>
-            <a:r>
-              <a:t>PRF - pulses per second; must be high enough to sample the Doppler.</a:t>
-            </a:r>
-          </a:p>
-          <a:p>
-            <a:pPr>
-              <a:spcAft>
-                <a:spcPts val="600"/>
-              </a:spcAft>
-              <a:defRPr sz="1400">
-                <a:solidFill>
-                  <a:srgbClr val="1F2A44"/>
-                </a:solidFill>
-              </a:defRPr>
-            </a:pPr>
-            <a:r>
-              <a:t>RDA (Range-Doppler Algorithm) - process range first, then azimuth via Doppler.</a:t>
-            </a:r>
-          </a:p>
-          <a:p>
-            <a:pPr>
-              <a:spcAft>
-                <a:spcPts val="600"/>
-              </a:spcAft>
-              <a:defRPr sz="1400">
-                <a:solidFill>
-                  <a:srgbClr val="1F2A44"/>
-                </a:solidFill>
-              </a:defRPr>
-            </a:pPr>
-            <a:r>
-              <a:t>Speckle - grainy noise from many small scatterers in one resolution cell.</a:t>
+              <a:defRPr sz="1700">
+                <a:solidFill>
+                  <a:srgbClr val="1F2A44"/>
+                </a:solidFill>
+              </a:defRPr>
+            </a:pPr>
+            <a:r>
+              <a:t>Slant-range resolution:  dR = c * b_r / (2B)</a:t>
+            </a:r>
+          </a:p>
+          <a:p>
+            <a:pPr>
+              <a:spcAft>
+                <a:spcPts val="600"/>
+              </a:spcAft>
+              <a:defRPr sz="1700">
+                <a:solidFill>
+                  <a:srgbClr val="1F2A44"/>
+                </a:solidFill>
+              </a:defRPr>
+            </a:pPr>
+            <a:r>
+              <a:t>Azimuth resolution:      rho_az = lam * R0 * b_a / (2 * L_syn)</a:t>
+            </a:r>
+          </a:p>
+          <a:p>
+            <a:pPr>
+              <a:spcAft>
+                <a:spcPts val="600"/>
+              </a:spcAft>
+              <a:defRPr sz="1700">
+                <a:solidFill>
+                  <a:srgbClr val="1F2A44"/>
+                </a:solidFill>
+              </a:defRPr>
+            </a:pPr>
+            <a:r>
+              <a:t>Synthetic aperture:      L_syn = vp * T_a,proc,  T_a,proc = alpha * Ta</a:t>
+            </a:r>
+          </a:p>
+          <a:p>
+            <a:pPr>
+              <a:spcAft>
+                <a:spcPts val="600"/>
+              </a:spcAft>
+              <a:defRPr sz="1700">
+                <a:solidFill>
+                  <a:srgbClr val="1F2A44"/>
+                </a:solidFill>
+              </a:defRPr>
+            </a:pPr>
+            <a:r>
+              <a:t>Full aperture, rect:     rho_az = La / 2</a:t>
+            </a:r>
+          </a:p>
+          <a:p>
+            <a:pPr>
+              <a:spcAft>
+                <a:spcPts val="600"/>
+              </a:spcAft>
+              <a:defRPr sz="1700">
+                <a:solidFill>
+                  <a:srgbClr val="1F2A44"/>
+                </a:solidFill>
+              </a:defRPr>
+            </a:pPr>
+            <a:r>
+              <a:t>Doppler bandwidth:       Bd = 2 vp / La</a:t>
+            </a:r>
+          </a:p>
+          <a:p>
+            <a:pPr>
+              <a:spcAft>
+                <a:spcPts val="600"/>
+              </a:spcAft>
+              <a:defRPr sz="1700">
+                <a:solidFill>
+                  <a:srgbClr val="1F2A44"/>
+                </a:solidFill>
+              </a:defRPr>
+            </a:pPr>
+            <a:r>
+              <a:t>Doppler rate:            Ka = 2 vp^2 / (lambda R0)</a:t>
+            </a:r>
+          </a:p>
+          <a:p>
+            <a:pPr>
+              <a:spcAft>
+                <a:spcPts val="600"/>
+              </a:spcAft>
+              <a:defRPr sz="1700">
+                <a:solidFill>
+                  <a:srgbClr val="1F2A44"/>
+                </a:solidFill>
+              </a:defRPr>
+            </a:pPr>
+            <a:r>
+              <a:t>Doppler centroid:        f_dc = 2 vr / lambda</a:t>
+            </a:r>
+          </a:p>
+          <a:p>
+            <a:pPr>
+              <a:spcAft>
+                <a:spcPts val="600"/>
+              </a:spcAft>
+              <a:defRPr sz="1700">
+                <a:solidFill>
+                  <a:srgbClr val="1F2A44"/>
+                </a:solidFill>
+              </a:defRPr>
+            </a:pPr>
+            <a:r>
+              <a:t>Beamwidth:               theta = lambda / La,  Ta = R0 * theta / vp</a:t>
+            </a:r>
+          </a:p>
+          <a:p>
+            <a:pPr>
+              <a:spcAft>
+                <a:spcPts val="600"/>
+              </a:spcAft>
+              <a:defRPr sz="1700">
+                <a:solidFill>
+                  <a:srgbClr val="1F2A44"/>
+                </a:solidFill>
+              </a:defRPr>
+            </a:pPr>
+            <a:r>
+              <a:t>Range to target:         R = c * tau / 2</a:t>
             </a:r>
           </a:p>
         </p:txBody>
@@ -4505,6 +4524,330 @@
 </file>
 
 <file path=ppt/slides/slide15.xml><?xml version="1.0" encoding="utf-8"?>
+<p:sld xmlns:a="http://schemas.openxmlformats.org/drawingml/2006/main" xmlns:p="http://schemas.openxmlformats.org/presentationml/2006/main" xmlns:r="http://schemas.openxmlformats.org/officeDocument/2006/relationships">
+  <p:cSld>
+    <p:bg>
+      <p:bgPr>
+        <a:solidFill>
+          <a:srgbClr val="FFFFFF"/>
+        </a:solidFill>
+        <a:effectLst/>
+      </p:bgPr>
+    </p:bg>
+    <p:spTree>
+      <p:nvGrpSpPr>
+        <p:cNvPr id="1" name=""/>
+        <p:cNvGrpSpPr/>
+        <p:nvPr/>
+      </p:nvGrpSpPr>
+      <p:grpSpPr/>
+      <p:sp>
+        <p:nvSpPr>
+          <p:cNvPr id="2" name="TextBox 1"/>
+          <p:cNvSpPr txBox="1"/>
+          <p:nvPr/>
+        </p:nvSpPr>
+        <p:spPr>
+          <a:xfrm>
+            <a:off x="548640" y="274320"/>
+            <a:ext cx="11064240" cy="822960"/>
+          </a:xfrm>
+          <a:prstGeom prst="rect">
+            <a:avLst/>
+          </a:prstGeom>
+          <a:noFill/>
+        </p:spPr>
+        <p:txBody>
+          <a:bodyPr wrap="square">
+            <a:spAutoFit/>
+          </a:bodyPr>
+          <a:lstStyle/>
+          <a:p>
+            <a:pPr>
+              <a:defRPr sz="2800" b="1">
+                <a:solidFill>
+                  <a:srgbClr val="1F2A44"/>
+                </a:solidFill>
+              </a:defRPr>
+            </a:pPr>
+            <a:r>
+              <a:t>Glossary of SAR terms</a:t>
+            </a:r>
+          </a:p>
+        </p:txBody>
+      </p:sp>
+      <p:sp>
+        <p:nvSpPr>
+          <p:cNvPr id="3" name="TextBox 2"/>
+          <p:cNvSpPr txBox="1"/>
+          <p:nvPr/>
+        </p:nvSpPr>
+        <p:spPr>
+          <a:xfrm>
+            <a:off x="640080" y="1234440"/>
+            <a:ext cx="10972800" cy="5212080"/>
+          </a:xfrm>
+          <a:prstGeom prst="rect">
+            <a:avLst/>
+          </a:prstGeom>
+          <a:noFill/>
+        </p:spPr>
+        <p:txBody>
+          <a:bodyPr wrap="square">
+            <a:spAutoFit/>
+          </a:bodyPr>
+          <a:lstStyle/>
+          <a:p>
+            <a:pPr>
+              <a:spcAft>
+                <a:spcPts val="600"/>
+              </a:spcAft>
+              <a:defRPr sz="1200">
+                <a:solidFill>
+                  <a:srgbClr val="1F2A44"/>
+                </a:solidFill>
+              </a:defRPr>
+            </a:pPr>
+            <a:r>
+              <a:t>Range - distance to target, from echo delay.</a:t>
+            </a:r>
+          </a:p>
+          <a:p>
+            <a:pPr>
+              <a:spcAft>
+                <a:spcPts val="600"/>
+              </a:spcAft>
+              <a:defRPr sz="1200">
+                <a:solidFill>
+                  <a:srgbClr val="1F2A44"/>
+                </a:solidFill>
+              </a:defRPr>
+            </a:pPr>
+            <a:r>
+              <a:t>Azimuth / cross-range - along-track position, from Doppler.</a:t>
+            </a:r>
+          </a:p>
+          <a:p>
+            <a:pPr>
+              <a:spcAft>
+                <a:spcPts val="600"/>
+              </a:spcAft>
+              <a:defRPr sz="1200">
+                <a:solidFill>
+                  <a:srgbClr val="1F2A44"/>
+                </a:solidFill>
+              </a:defRPr>
+            </a:pPr>
+            <a:r>
+              <a:t>Slant-range resolution - smallest separable range, c*b_r/(2B).</a:t>
+            </a:r>
+          </a:p>
+          <a:p>
+            <a:pPr>
+              <a:spcAft>
+                <a:spcPts val="600"/>
+              </a:spcAft>
+              <a:defRPr sz="1200">
+                <a:solidFill>
+                  <a:srgbClr val="1F2A44"/>
+                </a:solidFill>
+              </a:defRPr>
+            </a:pPr>
+            <a:r>
+              <a:t>Azimuth resolution - smallest separable along-track distance, lam*R0*b_a/(2*L_syn).</a:t>
+            </a:r>
+          </a:p>
+          <a:p>
+            <a:pPr>
+              <a:spcAft>
+                <a:spcPts val="600"/>
+              </a:spcAft>
+              <a:defRPr sz="1200">
+                <a:solidFill>
+                  <a:srgbClr val="1F2A44"/>
+                </a:solidFill>
+              </a:defRPr>
+            </a:pPr>
+            <a:r>
+              <a:t>IPR - impulse response; the focused shape of a point target.</a:t>
+            </a:r>
+          </a:p>
+          <a:p>
+            <a:pPr>
+              <a:spcAft>
+                <a:spcPts val="600"/>
+              </a:spcAft>
+              <a:defRPr sz="1200">
+                <a:solidFill>
+                  <a:srgbClr val="1F2A44"/>
+                </a:solidFill>
+              </a:defRPr>
+            </a:pPr>
+            <a:r>
+              <a:t>Window broadening factor - how much a taper widens the mainlobe (~1.3 Hann).</a:t>
+            </a:r>
+          </a:p>
+          <a:p>
+            <a:pPr>
+              <a:spcAft>
+                <a:spcPts val="600"/>
+              </a:spcAft>
+              <a:defRPr sz="1200">
+                <a:solidFill>
+                  <a:srgbClr val="1F2A44"/>
+                </a:solidFill>
+              </a:defRPr>
+            </a:pPr>
+            <a:r>
+              <a:t>Synthetic aperture L_syn - along-track extent of coherent observation.</a:t>
+            </a:r>
+          </a:p>
+          <a:p>
+            <a:pPr>
+              <a:spcAft>
+                <a:spcPts val="600"/>
+              </a:spcAft>
+              <a:defRPr sz="1200">
+                <a:solidFill>
+                  <a:srgbClr val="1F2A44"/>
+                </a:solidFill>
+              </a:defRPr>
+            </a:pPr>
+            <a:r>
+              <a:t>Processed aperture alpha - fraction of the illumination time used.</a:t>
+            </a:r>
+          </a:p>
+          <a:p>
+            <a:pPr>
+              <a:spcAft>
+                <a:spcPts val="600"/>
+              </a:spcAft>
+              <a:defRPr sz="1200">
+                <a:solidFill>
+                  <a:srgbClr val="1F2A44"/>
+                </a:solidFill>
+              </a:defRPr>
+            </a:pPr>
+            <a:r>
+              <a:t>Slant range R0 - straight-line distance from radar to target.</a:t>
+            </a:r>
+          </a:p>
+          <a:p>
+            <a:pPr>
+              <a:spcAft>
+                <a:spcPts val="600"/>
+              </a:spcAft>
+              <a:defRPr sz="1200">
+                <a:solidFill>
+                  <a:srgbClr val="1F2A44"/>
+                </a:solidFill>
+              </a:defRPr>
+            </a:pPr>
+            <a:r>
+              <a:t>Chirp - a pulse whose frequency sweeps over time.</a:t>
+            </a:r>
+          </a:p>
+          <a:p>
+            <a:pPr>
+              <a:spcAft>
+                <a:spcPts val="600"/>
+              </a:spcAft>
+              <a:defRPr sz="1200">
+                <a:solidFill>
+                  <a:srgbClr val="1F2A44"/>
+                </a:solidFill>
+              </a:defRPr>
+            </a:pPr>
+            <a:r>
+              <a:t>Pulse / range compression - matched filtering that sharpens echoes in range.</a:t>
+            </a:r>
+          </a:p>
+          <a:p>
+            <a:pPr>
+              <a:spcAft>
+                <a:spcPts val="600"/>
+              </a:spcAft>
+              <a:defRPr sz="1200">
+                <a:solidFill>
+                  <a:srgbClr val="1F2A44"/>
+                </a:solidFill>
+              </a:defRPr>
+            </a:pPr>
+            <a:r>
+              <a:t>Doppler history - the changing echo frequency as the platform passes the target.</a:t>
+            </a:r>
+          </a:p>
+          <a:p>
+            <a:pPr>
+              <a:spcAft>
+                <a:spcPts val="600"/>
+              </a:spcAft>
+              <a:defRPr sz="1200">
+                <a:solidFill>
+                  <a:srgbClr val="1F2A44"/>
+                </a:solidFill>
+              </a:defRPr>
+            </a:pPr>
+            <a:r>
+              <a:t>Doppler centroid - the mean Doppler shift (zero for a still target broadside).</a:t>
+            </a:r>
+          </a:p>
+          <a:p>
+            <a:pPr>
+              <a:spcAft>
+                <a:spcPts val="600"/>
+              </a:spcAft>
+              <a:defRPr sz="1200">
+                <a:solidFill>
+                  <a:srgbClr val="1F2A44"/>
+                </a:solidFill>
+              </a:defRPr>
+            </a:pPr>
+            <a:r>
+              <a:t>PRF - pulses per second; must be high enough to sample the Doppler.</a:t>
+            </a:r>
+          </a:p>
+          <a:p>
+            <a:pPr>
+              <a:spcAft>
+                <a:spcPts val="600"/>
+              </a:spcAft>
+              <a:defRPr sz="1200">
+                <a:solidFill>
+                  <a:srgbClr val="1F2A44"/>
+                </a:solidFill>
+              </a:defRPr>
+            </a:pPr>
+            <a:r>
+              <a:t>RDA (Range-Doppler Algorithm) - process range first, then azimuth via Doppler.</a:t>
+            </a:r>
+          </a:p>
+          <a:p>
+            <a:pPr>
+              <a:spcAft>
+                <a:spcPts val="600"/>
+              </a:spcAft>
+              <a:defRPr sz="1200">
+                <a:solidFill>
+                  <a:srgbClr val="1F2A44"/>
+                </a:solidFill>
+              </a:defRPr>
+            </a:pPr>
+            <a:r>
+              <a:t>Speckle - grainy noise from many small scatterers in one resolution cell.</a:t>
+            </a:r>
+          </a:p>
+        </p:txBody>
+      </p:sp>
+    </p:spTree>
+  </p:cSld>
+  <p:clrMapOvr>
+    <a:masterClrMapping/>
+  </p:clrMapOvr>
+</p:sld>
+</file>
+
+<file path=ppt/slides/slide16.xml><?xml version="1.0" encoding="utf-8"?>
 <p:sld xmlns:a="http://schemas.openxmlformats.org/drawingml/2006/main" xmlns:p="http://schemas.openxmlformats.org/presentationml/2006/main" xmlns:r="http://schemas.openxmlformats.org/officeDocument/2006/relationships">
   <p:cSld>
     <p:bg>
@@ -5166,7 +5509,7 @@
               </a:defRPr>
             </a:pPr>
             <a:r>
-              <a:t>Five sliders + one checkbox update both panels live (~12 frames/second).</a:t>
+              <a:t>Six sliders + one checkbox update both panels live (~12 frames/second).</a:t>
             </a:r>
           </a:p>
           <a:p>
@@ -5181,7 +5524,37 @@
               </a:defRPr>
             </a:pPr>
             <a:r>
-              <a:t>Live read-out: dR, rho_az, f_dc, Bd, Na.</a:t>
+              <a:t>Sliders: bandwidth, radial velocity, antenna length, along-track velocity,</a:t>
+            </a:r>
+          </a:p>
+          <a:p>
+            <a:pPr lvl="1">
+              <a:spcAft>
+                <a:spcPts val="600"/>
+              </a:spcAft>
+              <a:defRPr sz="1600">
+                <a:solidFill>
+                  <a:srgbClr val="555555"/>
+                </a:solidFill>
+              </a:defRPr>
+            </a:pPr>
+            <a:r>
+              <a:t>processed aperture, SNR. Checkbox: speckle.</a:t>
+            </a:r>
+          </a:p>
+          <a:p>
+            <a:pPr>
+              <a:spcAft>
+                <a:spcPts val="600"/>
+              </a:spcAft>
+              <a:defRPr sz="1800">
+                <a:solidFill>
+                  <a:srgbClr val="1F2A44"/>
+                </a:solidFill>
+              </a:defRPr>
+            </a:pPr>
+            <a:r>
+              <a:t>Live read-out: dR, rho_az (with broadening factors), f_dc, Bd, Na.</a:t>
             </a:r>
           </a:p>
           <a:p>
@@ -5631,7 +6004,7 @@
               </a:defRPr>
             </a:pPr>
             <a:r>
-              <a:t>Range resolution dR = c / (2B).</a:t>
+              <a:t>Slant-range resolution dR = c * b_r / (2B).</a:t>
             </a:r>
           </a:p>
           <a:p>
@@ -5646,6 +6019,21 @@
               </a:defRPr>
             </a:pPr>
             <a:r>
+              <a:t>b_r = range IPR windowing broadening factor (1.0 rect, ~1.3 Hann).</a:t>
+            </a:r>
+          </a:p>
+          <a:p>
+            <a:pPr>
+              <a:spcAft>
+                <a:spcPts val="600"/>
+              </a:spcAft>
+              <a:defRPr sz="1400">
+                <a:solidFill>
+                  <a:srgbClr val="1F2A44"/>
+                </a:solidFill>
+              </a:defRPr>
+            </a:pPr>
+            <a:r>
               <a:t>Wider B -&gt; narrower mainlobe -&gt; sharper in range.</a:t>
             </a:r>
           </a:p>
@@ -5662,21 +6050,6 @@
             </a:pPr>
             <a:r>
               <a:t>Target POSITION does not move: peak stays at R0.</a:t>
-            </a:r>
-          </a:p>
-          <a:p>
-            <a:pPr>
-              <a:spcAft>
-                <a:spcPts val="600"/>
-              </a:spcAft>
-              <a:defRPr sz="1400">
-                <a:solidFill>
-                  <a:srgbClr val="1F2A44"/>
-                </a:solidFill>
-              </a:defRPr>
-            </a:pPr>
-            <a:r>
-              <a:t>Clarity only, not position.</a:t>
             </a:r>
           </a:p>
         </p:txBody>
@@ -5829,7 +6202,7 @@
               </a:defRPr>
             </a:pPr>
             <a:r>
-              <a:t>Also causes range walk (vr * Ta).</a:t>
+              <a:t>Also causes range walk (vr * T_a,proc).</a:t>
             </a:r>
           </a:p>
           <a:p>
@@ -5967,7 +6340,7 @@
               </a:defRPr>
             </a:pPr>
             <a:r>
-              <a:t>Azimuth resolution rho_az = La / 2.</a:t>
+              <a:t>Azimuth resolution rho_az = lam*R0*b_a / (2*L_syn).</a:t>
             </a:r>
           </a:p>
           <a:p>
@@ -5982,37 +6355,37 @@
               </a:defRPr>
             </a:pPr>
             <a:r>
+              <a:t>L_syn = vp*T_a,proc = synthetic aperture length.</a:t>
+            </a:r>
+          </a:p>
+          <a:p>
+            <a:pPr>
+              <a:spcAft>
+                <a:spcPts val="600"/>
+              </a:spcAft>
+              <a:defRPr sz="1400">
+                <a:solidFill>
+                  <a:srgbClr val="1F2A44"/>
+                </a:solidFill>
+              </a:defRPr>
+            </a:pPr>
+            <a:r>
+              <a:t>Full aperture, rect: reduces to rho_az = La / 2.</a:t>
+            </a:r>
+          </a:p>
+          <a:p>
+            <a:pPr>
+              <a:spcAft>
+                <a:spcPts val="600"/>
+              </a:spcAft>
+              <a:defRPr sz="1400">
+                <a:solidFill>
+                  <a:srgbClr val="1F2A44"/>
+                </a:solidFill>
+              </a:defRPr>
+            </a:pPr>
+            <a:r>
               <a:t>Doppler bandwidth Bd = 2 vp / La.</a:t>
-            </a:r>
-          </a:p>
-          <a:p>
-            <a:pPr>
-              <a:spcAft>
-                <a:spcPts val="600"/>
-              </a:spcAft>
-              <a:defRPr sz="1400">
-                <a:solidFill>
-                  <a:srgbClr val="1F2A44"/>
-                </a:solidFill>
-              </a:defRPr>
-            </a:pPr>
-            <a:r>
-              <a:t>Shorter antenna -&gt; wider beam -&gt; finer azimuth resolution.</a:t>
-            </a:r>
-          </a:p>
-          <a:p>
-            <a:pPr>
-              <a:spcAft>
-                <a:spcPts val="600"/>
-              </a:spcAft>
-              <a:defRPr sz="1400">
-                <a:solidFill>
-                  <a:srgbClr val="1F2A44"/>
-                </a:solidFill>
-              </a:defRPr>
-            </a:pPr>
-            <a:r>
-              <a:t>Target POSITION does not move: peak stays at x0.</a:t>
             </a:r>
           </a:p>
         </p:txBody>
